--- a/PRJ13797_JMUX_NextSteps_Final.pptx
+++ b/PRJ13797_JMUX_NextSteps_Final.pptx
@@ -3155,7 +3155,7 @@
           <a:p>
             <a:pPr algn="l"/>
             <a:r>
-              <a:rPr sz="2400" b="1" i="0">
+              <a:rPr sz="2400" b="1">
                 <a:solidFill>
                   <a:srgbClr val="FFFFFF"/>
                 </a:solidFill>
@@ -3189,7 +3189,7 @@
           <a:p>
             <a:pPr algn="l"/>
             <a:r>
-              <a:rPr sz="950" b="0" i="0">
+              <a:rPr sz="950" b="0">
                 <a:solidFill>
                   <a:srgbClr val="BDD7EE"/>
                 </a:solidFill>
@@ -3266,7 +3266,7 @@
           <a:p>
             <a:pPr algn="l"/>
             <a:r>
-              <a:rPr sz="1100" b="1" i="0">
+              <a:rPr sz="1100" b="1">
                 <a:solidFill>
                   <a:srgbClr val="FFFFFF"/>
                 </a:solidFill>
@@ -3433,7 +3433,7 @@
           <a:p>
             <a:pPr algn="ctr"/>
             <a:r>
-              <a:rPr sz="900" b="1" i="0">
+              <a:rPr sz="900" b="1">
                 <a:solidFill>
                   <a:srgbClr val="FFFFFF"/>
                 </a:solidFill>
@@ -3467,7 +3467,7 @@
           <a:p>
             <a:pPr algn="l"/>
             <a:r>
-              <a:rPr sz="1000" b="0" i="0">
+              <a:rPr sz="1000" b="0">
                 <a:solidFill>
                   <a:srgbClr val="1F3964"/>
                 </a:solidFill>
@@ -3589,7 +3589,7 @@
           <a:p>
             <a:pPr algn="ctr"/>
             <a:r>
-              <a:rPr sz="900" b="1" i="0">
+              <a:rPr sz="900" b="1">
                 <a:solidFill>
                   <a:srgbClr val="FFFFFF"/>
                 </a:solidFill>
@@ -3623,7 +3623,7 @@
           <a:p>
             <a:pPr algn="l"/>
             <a:r>
-              <a:rPr sz="1000" b="0" i="0">
+              <a:rPr sz="1000" b="0">
                 <a:solidFill>
                   <a:srgbClr val="1F3964"/>
                 </a:solidFill>
@@ -3745,7 +3745,7 @@
           <a:p>
             <a:pPr algn="ctr"/>
             <a:r>
-              <a:rPr sz="900" b="1" i="0">
+              <a:rPr sz="900" b="1">
                 <a:solidFill>
                   <a:srgbClr val="FFFFFF"/>
                 </a:solidFill>
@@ -3779,7 +3779,7 @@
           <a:p>
             <a:pPr algn="l"/>
             <a:r>
-              <a:rPr sz="1000" b="0" i="0">
+              <a:rPr sz="1000" b="0">
                 <a:solidFill>
                   <a:srgbClr val="1F3964"/>
                 </a:solidFill>
@@ -3901,7 +3901,7 @@
           <a:p>
             <a:pPr algn="ctr"/>
             <a:r>
-              <a:rPr sz="900" b="1" i="0">
+              <a:rPr sz="900" b="1">
                 <a:solidFill>
                   <a:srgbClr val="FFFFFF"/>
                 </a:solidFill>
@@ -3935,7 +3935,7 @@
           <a:p>
             <a:pPr algn="l"/>
             <a:r>
-              <a:rPr sz="1000" b="0" i="0">
+              <a:rPr sz="1000" b="0">
                 <a:solidFill>
                   <a:srgbClr val="1F3964"/>
                 </a:solidFill>
@@ -4057,7 +4057,7 @@
           <a:p>
             <a:pPr algn="ctr"/>
             <a:r>
-              <a:rPr sz="900" b="1" i="0">
+              <a:rPr sz="900" b="1">
                 <a:solidFill>
                   <a:srgbClr val="FFFFFF"/>
                 </a:solidFill>
@@ -4091,7 +4091,7 @@
           <a:p>
             <a:pPr algn="l"/>
             <a:r>
-              <a:rPr sz="1000" b="0" i="0">
+              <a:rPr sz="1000" b="0">
                 <a:solidFill>
                   <a:srgbClr val="1F3964"/>
                 </a:solidFill>
@@ -4213,7 +4213,7 @@
           <a:p>
             <a:pPr algn="ctr"/>
             <a:r>
-              <a:rPr sz="900" b="1" i="0">
+              <a:rPr sz="900" b="1">
                 <a:solidFill>
                   <a:srgbClr val="FFFFFF"/>
                 </a:solidFill>
@@ -4247,7 +4247,7 @@
           <a:p>
             <a:pPr algn="l"/>
             <a:r>
-              <a:rPr sz="1000" b="0" i="0">
+              <a:rPr sz="1000" b="0">
                 <a:solidFill>
                   <a:srgbClr val="1F3964"/>
                 </a:solidFill>
@@ -4324,7 +4324,7 @@
           <a:p>
             <a:pPr algn="l"/>
             <a:r>
-              <a:rPr sz="1100" b="1" i="0">
+              <a:rPr sz="1100" b="1">
                 <a:solidFill>
                   <a:srgbClr val="FFFFFF"/>
                 </a:solidFill>
@@ -4387,8 +4387,53 @@
         </p:nvSpPr>
         <p:spPr>
           <a:xfrm>
-            <a:off x="329184" y="4681728"/>
-            <a:ext cx="256032" cy="256032"/>
+            <a:off x="292608" y="4617720"/>
+            <a:ext cx="11594592" cy="576072"/>
+          </a:xfrm>
+          <a:prstGeom prst="rect">
+            <a:avLst/>
+          </a:prstGeom>
+          <a:solidFill>
+            <a:srgbClr val="FFFFFF"/>
+          </a:solidFill>
+          <a:ln>
+            <a:solidFill>
+              <a:srgbClr val="D8D8D8"/>
+            </a:solidFill>
+          </a:ln>
+        </p:spPr>
+        <p:style>
+          <a:lnRef idx="1">
+            <a:schemeClr val="accent1"/>
+          </a:lnRef>
+          <a:fillRef idx="3">
+            <a:schemeClr val="accent1"/>
+          </a:fillRef>
+          <a:effectRef idx="2">
+            <a:schemeClr val="accent1"/>
+          </a:effectRef>
+          <a:fontRef idx="minor">
+            <a:schemeClr val="lt1"/>
+          </a:fontRef>
+        </p:style>
+        <p:txBody>
+          <a:bodyPr rtlCol="0" anchor="ctr"/>
+          <a:lstStyle/>
+          <a:p>
+            <a:pPr algn="ctr"/>
+          </a:p>
+        </p:txBody>
+      </p:sp>
+      <p:sp>
+        <p:nvSpPr>
+          <p:cNvPr id="36" name="Rectangle 35"/>
+          <p:cNvSpPr/>
+          <p:nvPr/>
+        </p:nvSpPr>
+        <p:spPr>
+          <a:xfrm>
+            <a:off x="329184" y="4709159"/>
+            <a:ext cx="292608" cy="292608"/>
           </a:xfrm>
           <a:prstGeom prst="rect">
             <a:avLst/>
@@ -4424,14 +4469,14 @@
       </p:sp>
       <p:sp>
         <p:nvSpPr>
-          <p:cNvPr id="36" name="TextBox 35"/>
+          <p:cNvPr id="37" name="TextBox 36"/>
           <p:cNvSpPr txBox="1"/>
           <p:nvPr/>
         </p:nvSpPr>
         <p:spPr>
           <a:xfrm>
-            <a:off x="329184" y="4681728"/>
-            <a:ext cx="256032" cy="256032"/>
+            <a:off x="329184" y="4709159"/>
+            <a:ext cx="292608" cy="292608"/>
           </a:xfrm>
           <a:prstGeom prst="rect">
             <a:avLst/>
@@ -4446,7 +4491,7 @@
           <a:p>
             <a:pPr algn="ctr"/>
             <a:r>
-              <a:rPr sz="800" b="1" i="0">
+              <a:rPr sz="800" b="1">
                 <a:solidFill>
                   <a:srgbClr val="FFFFFF"/>
                 </a:solidFill>
@@ -4458,14 +4503,14 @@
       </p:sp>
       <p:sp>
         <p:nvSpPr>
-          <p:cNvPr id="37" name="TextBox 36"/>
+          <p:cNvPr id="38" name="TextBox 37"/>
           <p:cNvSpPr txBox="1"/>
           <p:nvPr/>
         </p:nvSpPr>
         <p:spPr>
           <a:xfrm>
-            <a:off x="676656" y="4654296"/>
-            <a:ext cx="11155680" cy="310896"/>
+            <a:off x="694944" y="4690872"/>
+            <a:ext cx="10789920" cy="502920"/>
           </a:xfrm>
           <a:prstGeom prst="rect">
             <a:avLst/>
@@ -4480,26 +4525,71 @@
           <a:p>
             <a:pPr algn="l"/>
             <a:r>
-              <a:rPr sz="1000" b="0" i="0">
+              <a:rPr sz="1000" b="0">
                 <a:solidFill>
                   <a:srgbClr val="1F3964"/>
                 </a:solidFill>
               </a:rPr>
-              <a:t>Legacy JMUX equipment old and delicate. Potential for Outage.</a:t>
-            </a:r>
-          </a:p>
-        </p:txBody>
-      </p:sp>
-      <p:sp>
-        <p:nvSpPr>
-          <p:cNvPr id="38" name="Rectangle 37"/>
+              <a:t>Legacy JMUX equipment is over 25 years old and brittle — faulty connectors, potential brittle fiber patch panels, face plates, connectors and cables. Potential for Outage.</a:t>
+            </a:r>
+          </a:p>
+        </p:txBody>
+      </p:sp>
+      <p:sp>
+        <p:nvSpPr>
+          <p:cNvPr id="39" name="Rectangle 38"/>
           <p:cNvSpPr/>
           <p:nvPr/>
         </p:nvSpPr>
         <p:spPr>
           <a:xfrm>
-            <a:off x="329184" y="5047488"/>
-            <a:ext cx="256032" cy="256032"/>
+            <a:off x="292608" y="5230368"/>
+            <a:ext cx="11594592" cy="576072"/>
+          </a:xfrm>
+          <a:prstGeom prst="rect">
+            <a:avLst/>
+          </a:prstGeom>
+          <a:solidFill>
+            <a:srgbClr val="F2F2F2"/>
+          </a:solidFill>
+          <a:ln>
+            <a:solidFill>
+              <a:srgbClr val="D8D8D8"/>
+            </a:solidFill>
+          </a:ln>
+        </p:spPr>
+        <p:style>
+          <a:lnRef idx="1">
+            <a:schemeClr val="accent1"/>
+          </a:lnRef>
+          <a:fillRef idx="3">
+            <a:schemeClr val="accent1"/>
+          </a:fillRef>
+          <a:effectRef idx="2">
+            <a:schemeClr val="accent1"/>
+          </a:effectRef>
+          <a:fontRef idx="minor">
+            <a:schemeClr val="lt1"/>
+          </a:fontRef>
+        </p:style>
+        <p:txBody>
+          <a:bodyPr rtlCol="0" anchor="ctr"/>
+          <a:lstStyle/>
+          <a:p>
+            <a:pPr algn="ctr"/>
+          </a:p>
+        </p:txBody>
+      </p:sp>
+      <p:sp>
+        <p:nvSpPr>
+          <p:cNvPr id="40" name="Rectangle 39"/>
+          <p:cNvSpPr/>
+          <p:nvPr/>
+        </p:nvSpPr>
+        <p:spPr>
+          <a:xfrm>
+            <a:off x="329184" y="5321807"/>
+            <a:ext cx="292608" cy="292608"/>
           </a:xfrm>
           <a:prstGeom prst="rect">
             <a:avLst/>
@@ -4535,14 +4625,14 @@
       </p:sp>
       <p:sp>
         <p:nvSpPr>
-          <p:cNvPr id="39" name="TextBox 38"/>
+          <p:cNvPr id="41" name="TextBox 40"/>
           <p:cNvSpPr txBox="1"/>
           <p:nvPr/>
         </p:nvSpPr>
         <p:spPr>
           <a:xfrm>
-            <a:off x="329184" y="5047488"/>
-            <a:ext cx="256032" cy="256032"/>
+            <a:off x="329184" y="5321807"/>
+            <a:ext cx="292608" cy="292608"/>
           </a:xfrm>
           <a:prstGeom prst="rect">
             <a:avLst/>
@@ -4557,7 +4647,7 @@
           <a:p>
             <a:pPr algn="ctr"/>
             <a:r>
-              <a:rPr sz="800" b="1" i="0">
+              <a:rPr sz="800" b="1">
                 <a:solidFill>
                   <a:srgbClr val="FFFFFF"/>
                 </a:solidFill>
@@ -4569,14 +4659,14 @@
       </p:sp>
       <p:sp>
         <p:nvSpPr>
-          <p:cNvPr id="40" name="TextBox 39"/>
+          <p:cNvPr id="42" name="TextBox 41"/>
           <p:cNvSpPr txBox="1"/>
           <p:nvPr/>
         </p:nvSpPr>
         <p:spPr>
           <a:xfrm>
-            <a:off x="676656" y="5020056"/>
-            <a:ext cx="11155680" cy="310896"/>
+            <a:off x="694944" y="5303520"/>
+            <a:ext cx="10789920" cy="502920"/>
           </a:xfrm>
           <a:prstGeom prst="rect">
             <a:avLst/>
@@ -4591,26 +4681,71 @@
           <a:p>
             <a:pPr algn="l"/>
             <a:r>
-              <a:rPr sz="1000" b="0" i="0">
+              <a:rPr sz="1000" b="0">
                 <a:solidFill>
                   <a:srgbClr val="1F3964"/>
                 </a:solidFill>
               </a:rPr>
-              <a:t>Ran into faulty connectors that are over 25 years old and not readily available with vendors.</a:t>
-            </a:r>
-          </a:p>
-        </p:txBody>
-      </p:sp>
-      <p:sp>
-        <p:nvSpPr>
-          <p:cNvPr id="41" name="Rectangle 40"/>
+              <a:t>Weather delay and delay in installing the equipment at sub-station (tracking weekly).</a:t>
+            </a:r>
+          </a:p>
+        </p:txBody>
+      </p:sp>
+      <p:sp>
+        <p:nvSpPr>
+          <p:cNvPr id="43" name="Rectangle 42"/>
           <p:cNvSpPr/>
           <p:nvPr/>
         </p:nvSpPr>
         <p:spPr>
           <a:xfrm>
-            <a:off x="329184" y="5413248"/>
-            <a:ext cx="256032" cy="256032"/>
+            <a:off x="292608" y="5843016"/>
+            <a:ext cx="11594592" cy="576072"/>
+          </a:xfrm>
+          <a:prstGeom prst="rect">
+            <a:avLst/>
+          </a:prstGeom>
+          <a:solidFill>
+            <a:srgbClr val="FFFFFF"/>
+          </a:solidFill>
+          <a:ln>
+            <a:solidFill>
+              <a:srgbClr val="D8D8D8"/>
+            </a:solidFill>
+          </a:ln>
+        </p:spPr>
+        <p:style>
+          <a:lnRef idx="1">
+            <a:schemeClr val="accent1"/>
+          </a:lnRef>
+          <a:fillRef idx="3">
+            <a:schemeClr val="accent1"/>
+          </a:fillRef>
+          <a:effectRef idx="2">
+            <a:schemeClr val="accent1"/>
+          </a:effectRef>
+          <a:fontRef idx="minor">
+            <a:schemeClr val="lt1"/>
+          </a:fontRef>
+        </p:style>
+        <p:txBody>
+          <a:bodyPr rtlCol="0" anchor="ctr"/>
+          <a:lstStyle/>
+          <a:p>
+            <a:pPr algn="ctr"/>
+          </a:p>
+        </p:txBody>
+      </p:sp>
+      <p:sp>
+        <p:nvSpPr>
+          <p:cNvPr id="44" name="Rectangle 43"/>
+          <p:cNvSpPr/>
+          <p:nvPr/>
+        </p:nvSpPr>
+        <p:spPr>
+          <a:xfrm>
+            <a:off x="329184" y="5934455"/>
+            <a:ext cx="292608" cy="292608"/>
           </a:xfrm>
           <a:prstGeom prst="rect">
             <a:avLst/>
@@ -4646,14 +4781,14 @@
       </p:sp>
       <p:sp>
         <p:nvSpPr>
-          <p:cNvPr id="42" name="TextBox 41"/>
+          <p:cNvPr id="45" name="TextBox 44"/>
           <p:cNvSpPr txBox="1"/>
           <p:nvPr/>
         </p:nvSpPr>
         <p:spPr>
           <a:xfrm>
-            <a:off x="329184" y="5413248"/>
-            <a:ext cx="256032" cy="256032"/>
+            <a:off x="329184" y="5934455"/>
+            <a:ext cx="292608" cy="292608"/>
           </a:xfrm>
           <a:prstGeom prst="rect">
             <a:avLst/>
@@ -4668,7 +4803,7 @@
           <a:p>
             <a:pPr algn="ctr"/>
             <a:r>
-              <a:rPr sz="800" b="1" i="0">
+              <a:rPr sz="800" b="1">
                 <a:solidFill>
                   <a:srgbClr val="FFFFFF"/>
                 </a:solidFill>
@@ -4680,14 +4815,14 @@
       </p:sp>
       <p:sp>
         <p:nvSpPr>
-          <p:cNvPr id="43" name="TextBox 42"/>
+          <p:cNvPr id="46" name="TextBox 45"/>
           <p:cNvSpPr txBox="1"/>
           <p:nvPr/>
         </p:nvSpPr>
         <p:spPr>
           <a:xfrm>
-            <a:off x="676656" y="5385816"/>
-            <a:ext cx="11155680" cy="310896"/>
+            <a:off x="694944" y="5916168"/>
+            <a:ext cx="10789920" cy="502920"/>
           </a:xfrm>
           <a:prstGeom prst="rect">
             <a:avLst/>
@@ -4702,229 +4837,7 @@
           <a:p>
             <a:pPr algn="l"/>
             <a:r>
-              <a:rPr sz="1000" b="0" i="0">
-                <a:solidFill>
-                  <a:srgbClr val="1F3964"/>
-                </a:solidFill>
-              </a:rPr>
-              <a:t>Potential brittle fiber patch panels, face plates, connectors and cables.</a:t>
-            </a:r>
-          </a:p>
-        </p:txBody>
-      </p:sp>
-      <p:sp>
-        <p:nvSpPr>
-          <p:cNvPr id="44" name="Rectangle 43"/>
-          <p:cNvSpPr/>
-          <p:nvPr/>
-        </p:nvSpPr>
-        <p:spPr>
-          <a:xfrm>
-            <a:off x="329184" y="5779008"/>
-            <a:ext cx="256032" cy="256032"/>
-          </a:xfrm>
-          <a:prstGeom prst="rect">
-            <a:avLst/>
-          </a:prstGeom>
-          <a:solidFill>
-            <a:srgbClr val="FFC000"/>
-          </a:solidFill>
-          <a:ln>
-            <a:noFill/>
-          </a:ln>
-        </p:spPr>
-        <p:style>
-          <a:lnRef idx="1">
-            <a:schemeClr val="accent1"/>
-          </a:lnRef>
-          <a:fillRef idx="3">
-            <a:schemeClr val="accent1"/>
-          </a:fillRef>
-          <a:effectRef idx="2">
-            <a:schemeClr val="accent1"/>
-          </a:effectRef>
-          <a:fontRef idx="minor">
-            <a:schemeClr val="lt1"/>
-          </a:fontRef>
-        </p:style>
-        <p:txBody>
-          <a:bodyPr rtlCol="0" anchor="ctr"/>
-          <a:lstStyle/>
-          <a:p>
-            <a:pPr algn="ctr"/>
-          </a:p>
-        </p:txBody>
-      </p:sp>
-      <p:sp>
-        <p:nvSpPr>
-          <p:cNvPr id="45" name="TextBox 44"/>
-          <p:cNvSpPr txBox="1"/>
-          <p:nvPr/>
-        </p:nvSpPr>
-        <p:spPr>
-          <a:xfrm>
-            <a:off x="329184" y="5779008"/>
-            <a:ext cx="256032" cy="256032"/>
-          </a:xfrm>
-          <a:prstGeom prst="rect">
-            <a:avLst/>
-          </a:prstGeom>
-          <a:noFill/>
-        </p:spPr>
-        <p:txBody>
-          <a:bodyPr wrap="square">
-            <a:spAutoFit/>
-          </a:bodyPr>
-          <a:lstStyle/>
-          <a:p>
-            <a:pPr algn="ctr"/>
-            <a:r>
-              <a:rPr sz="800" b="1" i="0">
-                <a:solidFill>
-                  <a:srgbClr val="FFFFFF"/>
-                </a:solidFill>
-              </a:rPr>
-              <a:t>🟡</a:t>
-            </a:r>
-          </a:p>
-        </p:txBody>
-      </p:sp>
-      <p:sp>
-        <p:nvSpPr>
-          <p:cNvPr id="46" name="TextBox 45"/>
-          <p:cNvSpPr txBox="1"/>
-          <p:nvPr/>
-        </p:nvSpPr>
-        <p:spPr>
-          <a:xfrm>
-            <a:off x="676656" y="5751576"/>
-            <a:ext cx="11155680" cy="310896"/>
-          </a:xfrm>
-          <a:prstGeom prst="rect">
-            <a:avLst/>
-          </a:prstGeom>
-          <a:noFill/>
-        </p:spPr>
-        <p:txBody>
-          <a:bodyPr wrap="square">
-            <a:spAutoFit/>
-          </a:bodyPr>
-          <a:lstStyle/>
-          <a:p>
-            <a:pPr algn="l"/>
-            <a:r>
-              <a:rPr sz="1000" b="0" i="0">
-                <a:solidFill>
-                  <a:srgbClr val="1F3964"/>
-                </a:solidFill>
-              </a:rPr>
-              <a:t>Weather delay and delay in installing the equipment at sub-station (tracking weekly).</a:t>
-            </a:r>
-          </a:p>
-        </p:txBody>
-      </p:sp>
-      <p:sp>
-        <p:nvSpPr>
-          <p:cNvPr id="47" name="Rectangle 46"/>
-          <p:cNvSpPr/>
-          <p:nvPr/>
-        </p:nvSpPr>
-        <p:spPr>
-          <a:xfrm>
-            <a:off x="329184" y="6144768"/>
-            <a:ext cx="256032" cy="256032"/>
-          </a:xfrm>
-          <a:prstGeom prst="rect">
-            <a:avLst/>
-          </a:prstGeom>
-          <a:solidFill>
-            <a:srgbClr val="FFC000"/>
-          </a:solidFill>
-          <a:ln>
-            <a:noFill/>
-          </a:ln>
-        </p:spPr>
-        <p:style>
-          <a:lnRef idx="1">
-            <a:schemeClr val="accent1"/>
-          </a:lnRef>
-          <a:fillRef idx="3">
-            <a:schemeClr val="accent1"/>
-          </a:fillRef>
-          <a:effectRef idx="2">
-            <a:schemeClr val="accent1"/>
-          </a:effectRef>
-          <a:fontRef idx="minor">
-            <a:schemeClr val="lt1"/>
-          </a:fontRef>
-        </p:style>
-        <p:txBody>
-          <a:bodyPr rtlCol="0" anchor="ctr"/>
-          <a:lstStyle/>
-          <a:p>
-            <a:pPr algn="ctr"/>
-          </a:p>
-        </p:txBody>
-      </p:sp>
-      <p:sp>
-        <p:nvSpPr>
-          <p:cNvPr id="48" name="TextBox 47"/>
-          <p:cNvSpPr txBox="1"/>
-          <p:nvPr/>
-        </p:nvSpPr>
-        <p:spPr>
-          <a:xfrm>
-            <a:off x="329184" y="6144768"/>
-            <a:ext cx="256032" cy="256032"/>
-          </a:xfrm>
-          <a:prstGeom prst="rect">
-            <a:avLst/>
-          </a:prstGeom>
-          <a:noFill/>
-        </p:spPr>
-        <p:txBody>
-          <a:bodyPr wrap="square">
-            <a:spAutoFit/>
-          </a:bodyPr>
-          <a:lstStyle/>
-          <a:p>
-            <a:pPr algn="ctr"/>
-            <a:r>
-              <a:rPr sz="800" b="1" i="0">
-                <a:solidFill>
-                  <a:srgbClr val="FFFFFF"/>
-                </a:solidFill>
-              </a:rPr>
-              <a:t>🟡</a:t>
-            </a:r>
-          </a:p>
-        </p:txBody>
-      </p:sp>
-      <p:sp>
-        <p:nvSpPr>
-          <p:cNvPr id="49" name="TextBox 48"/>
-          <p:cNvSpPr txBox="1"/>
-          <p:nvPr/>
-        </p:nvSpPr>
-        <p:spPr>
-          <a:xfrm>
-            <a:off x="676656" y="6117336"/>
-            <a:ext cx="11155680" cy="310896"/>
-          </a:xfrm>
-          <a:prstGeom prst="rect">
-            <a:avLst/>
-          </a:prstGeom>
-          <a:noFill/>
-        </p:spPr>
-        <p:txBody>
-          <a:bodyPr wrap="square">
-            <a:spAutoFit/>
-          </a:bodyPr>
-          <a:lstStyle/>
-          <a:p>
-            <a:pPr algn="l"/>
-            <a:r>
-              <a:rPr sz="1000" b="0" i="0">
+              <a:rPr sz="1000" b="0">
                 <a:solidFill>
                   <a:srgbClr val="1F3964"/>
                 </a:solidFill>
@@ -4936,7 +4849,7 @@
       </p:sp>
       <p:sp>
         <p:nvSpPr>
-          <p:cNvPr id="50" name="Rectangle 49"/>
+          <p:cNvPr id="47" name="Rectangle 46"/>
           <p:cNvSpPr/>
           <p:nvPr/>
         </p:nvSpPr>
@@ -4979,7 +4892,7 @@
       </p:sp>
       <p:sp>
         <p:nvSpPr>
-          <p:cNvPr id="51" name="TextBox 50"/>
+          <p:cNvPr id="48" name="TextBox 47"/>
           <p:cNvSpPr txBox="1"/>
           <p:nvPr/>
         </p:nvSpPr>
@@ -5001,7 +4914,7 @@
           <a:p>
             <a:pPr algn="l"/>
             <a:r>
-              <a:rPr sz="800" b="0" i="0">
+              <a:rPr sz="800" b="0">
                 <a:solidFill>
                   <a:srgbClr val="FFFFFF"/>
                 </a:solidFill>
